--- a/output/Report_20251216.pptx
+++ b/output/Report_20251216.pptx
@@ -5148,7 +5148,7 @@
       </p:sp>
       <p:pic>
         <p:nvPicPr>
-          <p:cNvPr id="4" name="Picture 3" descr="tmp0id_5r3e.png"/>
+          <p:cNvPr id="4" name="Picture 3" descr="tmpcs2al72_.png"/>
           <p:cNvPicPr>
             <a:picLocks noChangeAspect="1"/>
           </p:cNvPicPr>
@@ -5242,7 +5242,7 @@
       </p:sp>
       <p:pic>
         <p:nvPicPr>
-          <p:cNvPr id="4" name="Picture 3" descr="tmpzygvb0tq.png"/>
+          <p:cNvPr id="4" name="Picture 3" descr="tmpf7na_fth.png"/>
           <p:cNvPicPr>
             <a:picLocks noChangeAspect="1"/>
           </p:cNvPicPr>
@@ -5336,7 +5336,7 @@
       </p:sp>
       <p:pic>
         <p:nvPicPr>
-          <p:cNvPr id="4" name="Picture 3" descr="tmpsuidqh14.png"/>
+          <p:cNvPr id="4" name="Picture 3" descr="tmpj_rb2vmq.png"/>
           <p:cNvPicPr>
             <a:picLocks noChangeAspect="1"/>
           </p:cNvPicPr>
@@ -5395,7 +5395,7 @@
       </p:sp>
       <p:pic>
         <p:nvPicPr>
-          <p:cNvPr id="3" name="Picture 2" descr="tmp2jtt_j_s.png"/>
+          <p:cNvPr id="3" name="Picture 2" descr="tmpgj9fu6bj.png"/>
           <p:cNvPicPr>
             <a:picLocks noChangeAspect="1"/>
           </p:cNvPicPr>
@@ -5489,7 +5489,7 @@
       </p:sp>
       <p:pic>
         <p:nvPicPr>
-          <p:cNvPr id="4" name="Picture 3" descr="tmpe4x0cz0d.png"/>
+          <p:cNvPr id="4" name="Picture 3" descr="tmp5xul2c3j.png"/>
           <p:cNvPicPr>
             <a:picLocks noChangeAspect="1"/>
           </p:cNvPicPr>
